--- a/topic04/talk-2/vite_react_ts_slides.pptx
+++ b/topic04/talk-2/vite_react_ts_slides.pptx
@@ -111,6 +111,20 @@
   <p:extLst>
     <p:ext uri="{EFAFB233-063F-42B5-8137-9DF3F51BA10A}">
       <p15:sldGuideLst xmlns:p15="http://schemas.microsoft.com/office/powerpoint/2012/main"/>
+    </p:ext>
+    <p:ext uri="{2D200454-40CA-4A62-9FC3-DE9A4176ACB9}">
+      <p15:notesGuideLst xmlns:p15="http://schemas.microsoft.com/office/powerpoint/2012/main">
+        <p15:guide id="1" orient="horz" pos="3840" userDrawn="1">
+          <p15:clr>
+            <a:srgbClr val="A4A3A4"/>
+          </p15:clr>
+        </p15:guide>
+        <p15:guide id="2" pos="2160" userDrawn="1">
+          <p15:clr>
+            <a:srgbClr val="A4A3A4"/>
+          </p15:clr>
+        </p15:guide>
+      </p15:notesGuideLst>
     </p:ext>
   </p:extLst>
 </p:presentation>
@@ -1989,7 +2003,18 @@
                 <a:ea typeface="Calibri" pitchFamily="34" charset="-122"/>
                 <a:cs typeface="Calibri" pitchFamily="34" charset="-120"/>
               </a:rPr>
-              <a:t>TypeScript transpile is very fast via esbuild</a:t>
+              <a:t>TypeScript </a:t>
+            </a:r>
+            <a:r>
+              <a:rPr lang="en-US" sz="1400" dirty="0" err="1">
+                <a:solidFill>
+                  <a:srgbClr val="B8C0E0"/>
+                </a:solidFill>
+                <a:latin typeface="Calibri" pitchFamily="34" charset="0"/>
+                <a:ea typeface="Calibri" pitchFamily="34" charset="-122"/>
+                <a:cs typeface="Calibri" pitchFamily="34" charset="-120"/>
+              </a:rPr>
+              <a:t>transpile</a:t>
             </a:r>
             <a:endParaRPr lang="en-US" sz="1400" dirty="0"/>
           </a:p>
@@ -3716,400 +3741,6 @@
           <a:lstStyle/>
           <a:p>
             <a:endParaRPr lang="en-IE"/>
-          </a:p>
-        </p:txBody>
-      </p:sp>
-      <p:sp>
-        <p:nvSpPr>
-          <p:cNvPr id="19" name="Shape 17"/>
-          <p:cNvSpPr/>
-          <p:nvPr/>
-        </p:nvSpPr>
-        <p:spPr>
-          <a:xfrm>
-            <a:off x="640080" y="3977640"/>
-            <a:ext cx="5291176" cy="2423160"/>
-          </a:xfrm>
-          <a:prstGeom prst="rect">
-            <a:avLst/>
-          </a:prstGeom>
-          <a:solidFill>
-            <a:srgbClr val="111A33"/>
-          </a:solidFill>
-          <a:ln w="12700">
-            <a:solidFill>
-              <a:srgbClr val="253057">
-                <a:alpha val="75000"/>
-              </a:srgbClr>
-            </a:solidFill>
-            <a:prstDash val="solid"/>
-          </a:ln>
-          <a:effectLst>
-            <a:outerShdw blurRad="50800" dist="19050" dir="2700000" algn="bl" rotWithShape="0">
-              <a:srgbClr val="000000">
-                <a:alpha val="25000"/>
-              </a:srgbClr>
-            </a:outerShdw>
-          </a:effectLst>
-        </p:spPr>
-        <p:txBody>
-          <a:bodyPr/>
-          <a:lstStyle/>
-          <a:p>
-            <a:endParaRPr lang="en-IE"/>
-          </a:p>
-        </p:txBody>
-      </p:sp>
-      <p:sp>
-        <p:nvSpPr>
-          <p:cNvPr id="20" name="Shape 18"/>
-          <p:cNvSpPr/>
-          <p:nvPr/>
-        </p:nvSpPr>
-        <p:spPr>
-          <a:xfrm>
-            <a:off x="640080" y="3977640"/>
-            <a:ext cx="109728" cy="2423160"/>
-          </a:xfrm>
-          <a:prstGeom prst="rect">
-            <a:avLst/>
-          </a:prstGeom>
-          <a:solidFill>
-            <a:srgbClr val="22D3EE"/>
-          </a:solidFill>
-          <a:ln w="12700">
-            <a:solidFill>
-              <a:srgbClr val="22D3EE"/>
-            </a:solidFill>
-            <a:prstDash val="solid"/>
-          </a:ln>
-        </p:spPr>
-        <p:txBody>
-          <a:bodyPr/>
-          <a:lstStyle/>
-          <a:p>
-            <a:endParaRPr lang="en-IE"/>
-          </a:p>
-        </p:txBody>
-      </p:sp>
-      <p:sp>
-        <p:nvSpPr>
-          <p:cNvPr id="21" name="Text 19"/>
-          <p:cNvSpPr/>
-          <p:nvPr/>
-        </p:nvSpPr>
-        <p:spPr>
-          <a:xfrm>
-            <a:off x="896112" y="4178808"/>
-            <a:ext cx="4833976" cy="320040"/>
-          </a:xfrm>
-          <a:prstGeom prst="rect">
-            <a:avLst/>
-          </a:prstGeom>
-          <a:noFill/>
-          <a:ln/>
-        </p:spPr>
-        <p:txBody>
-          <a:bodyPr wrap="square" rtlCol="0" anchor="ctr"/>
-          <a:lstStyle/>
-          <a:p>
-            <a:pPr marL="0" indent="0">
-              <a:buNone/>
-            </a:pPr>
-            <a:r>
-              <a:rPr lang="en-US" sz="1800" b="1" dirty="0">
-                <a:solidFill>
-                  <a:srgbClr val="EAF0FF"/>
-                </a:solidFill>
-                <a:latin typeface="Calibri" pitchFamily="34" charset="0"/>
-                <a:ea typeface="Calibri" pitchFamily="34" charset="-122"/>
-                <a:cs typeface="Calibri" pitchFamily="34" charset="-120"/>
-              </a:rPr>
-              <a:t>React + TS specifics</a:t>
-            </a:r>
-            <a:endParaRPr lang="en-US" sz="1800" dirty="0"/>
-          </a:p>
-        </p:txBody>
-      </p:sp>
-      <p:sp>
-        <p:nvSpPr>
-          <p:cNvPr id="22" name="Text 20"/>
-          <p:cNvSpPr/>
-          <p:nvPr/>
-        </p:nvSpPr>
-        <p:spPr>
-          <a:xfrm>
-            <a:off x="932688" y="4617720"/>
-            <a:ext cx="4788256" cy="1600200"/>
-          </a:xfrm>
-          <a:prstGeom prst="rect">
-            <a:avLst/>
-          </a:prstGeom>
-          <a:noFill/>
-          <a:ln/>
-        </p:spPr>
-        <p:txBody>
-          <a:bodyPr wrap="square" rtlCol="0" anchor="t"/>
-          <a:lstStyle/>
-          <a:p>
-            <a:pPr marL="228600" indent="-228600">
-              <a:spcAft>
-                <a:spcPts val="600"/>
-              </a:spcAft>
-              <a:buSzPct val="100000"/>
-              <a:buChar char="•"/>
-            </a:pPr>
-            <a:r>
-              <a:rPr lang="en-US" sz="1400" dirty="0">
-                <a:solidFill>
-                  <a:srgbClr val="B8C0E0"/>
-                </a:solidFill>
-                <a:latin typeface="Calibri" pitchFamily="34" charset="0"/>
-                <a:ea typeface="Calibri" pitchFamily="34" charset="-122"/>
-                <a:cs typeface="Calibri" pitchFamily="34" charset="-120"/>
-              </a:rPr>
-              <a:t>Use @vitejs/plugin-react (or -react-swc) for React Fast Refresh</a:t>
-            </a:r>
-            <a:endParaRPr lang="en-US" sz="1400" dirty="0"/>
-          </a:p>
-          <a:p>
-            <a:pPr marL="228600" indent="-228600">
-              <a:spcAft>
-                <a:spcPts val="600"/>
-              </a:spcAft>
-              <a:buSzPct val="100000"/>
-              <a:buChar char="•"/>
-            </a:pPr>
-            <a:r>
-              <a:rPr lang="en-US" sz="1400" dirty="0">
-                <a:solidFill>
-                  <a:srgbClr val="B8C0E0"/>
-                </a:solidFill>
-                <a:latin typeface="Calibri" pitchFamily="34" charset="0"/>
-                <a:ea typeface="Calibri" pitchFamily="34" charset="-122"/>
-                <a:cs typeface="Calibri" pitchFamily="34" charset="-120"/>
-              </a:rPr>
-              <a:t>Vite transpiles TypeScript via esbuild (for speed)</a:t>
-            </a:r>
-            <a:endParaRPr lang="en-US" sz="1400" dirty="0"/>
-          </a:p>
-          <a:p>
-            <a:pPr marL="228600" indent="-228600">
-              <a:spcAft>
-                <a:spcPts val="600"/>
-              </a:spcAft>
-              <a:buSzPct val="100000"/>
-              <a:buChar char="•"/>
-            </a:pPr>
-            <a:r>
-              <a:rPr lang="en-US" sz="1400" dirty="0">
-                <a:solidFill>
-                  <a:srgbClr val="B8C0E0"/>
-                </a:solidFill>
-                <a:latin typeface="Calibri" pitchFamily="34" charset="0"/>
-                <a:ea typeface="Calibri" pitchFamily="34" charset="-122"/>
-                <a:cs typeface="Calibri" pitchFamily="34" charset="-120"/>
-              </a:rPr>
-              <a:t>Run type-checking separately (tsc --noEmit --watch) if needed</a:t>
-            </a:r>
-            <a:endParaRPr lang="en-US" sz="1400" dirty="0"/>
-          </a:p>
-        </p:txBody>
-      </p:sp>
-      <p:sp>
-        <p:nvSpPr>
-          <p:cNvPr id="23" name="Shape 21"/>
-          <p:cNvSpPr/>
-          <p:nvPr/>
-        </p:nvSpPr>
-        <p:spPr>
-          <a:xfrm>
-            <a:off x="6260440" y="3977640"/>
-            <a:ext cx="5291176" cy="2423160"/>
-          </a:xfrm>
-          <a:prstGeom prst="rect">
-            <a:avLst/>
-          </a:prstGeom>
-          <a:solidFill>
-            <a:srgbClr val="111A33"/>
-          </a:solidFill>
-          <a:ln w="12700">
-            <a:solidFill>
-              <a:srgbClr val="253057">
-                <a:alpha val="75000"/>
-              </a:srgbClr>
-            </a:solidFill>
-            <a:prstDash val="solid"/>
-          </a:ln>
-          <a:effectLst>
-            <a:outerShdw blurRad="50800" dist="19050" dir="2700000" algn="bl" rotWithShape="0">
-              <a:srgbClr val="000000">
-                <a:alpha val="25000"/>
-              </a:srgbClr>
-            </a:outerShdw>
-          </a:effectLst>
-        </p:spPr>
-        <p:txBody>
-          <a:bodyPr/>
-          <a:lstStyle/>
-          <a:p>
-            <a:endParaRPr lang="en-IE"/>
-          </a:p>
-        </p:txBody>
-      </p:sp>
-      <p:sp>
-        <p:nvSpPr>
-          <p:cNvPr id="24" name="Shape 22"/>
-          <p:cNvSpPr/>
-          <p:nvPr/>
-        </p:nvSpPr>
-        <p:spPr>
-          <a:xfrm>
-            <a:off x="6260440" y="3977640"/>
-            <a:ext cx="109728" cy="2423160"/>
-          </a:xfrm>
-          <a:prstGeom prst="rect">
-            <a:avLst/>
-          </a:prstGeom>
-          <a:solidFill>
-            <a:srgbClr val="A855F7"/>
-          </a:solidFill>
-          <a:ln w="12700">
-            <a:solidFill>
-              <a:srgbClr val="A855F7"/>
-            </a:solidFill>
-            <a:prstDash val="solid"/>
-          </a:ln>
-        </p:spPr>
-        <p:txBody>
-          <a:bodyPr/>
-          <a:lstStyle/>
-          <a:p>
-            <a:endParaRPr lang="en-IE"/>
-          </a:p>
-        </p:txBody>
-      </p:sp>
-      <p:sp>
-        <p:nvSpPr>
-          <p:cNvPr id="25" name="Text 23"/>
-          <p:cNvSpPr/>
-          <p:nvPr/>
-        </p:nvSpPr>
-        <p:spPr>
-          <a:xfrm>
-            <a:off x="6516472" y="4178808"/>
-            <a:ext cx="4833976" cy="320040"/>
-          </a:xfrm>
-          <a:prstGeom prst="rect">
-            <a:avLst/>
-          </a:prstGeom>
-          <a:noFill/>
-          <a:ln/>
-        </p:spPr>
-        <p:txBody>
-          <a:bodyPr wrap="square" rtlCol="0" anchor="ctr"/>
-          <a:lstStyle/>
-          <a:p>
-            <a:pPr marL="0" indent="0">
-              <a:buNone/>
-            </a:pPr>
-            <a:r>
-              <a:rPr lang="en-US" sz="1800" b="1" dirty="0">
-                <a:solidFill>
-                  <a:srgbClr val="EAF0FF"/>
-                </a:solidFill>
-                <a:latin typeface="Calibri" pitchFamily="34" charset="0"/>
-                <a:ea typeface="Calibri" pitchFamily="34" charset="-122"/>
-                <a:cs typeface="Calibri" pitchFamily="34" charset="-120"/>
-              </a:rPr>
-              <a:t>Ergonomic defaults</a:t>
-            </a:r>
-            <a:endParaRPr lang="en-US" sz="1800" dirty="0"/>
-          </a:p>
-        </p:txBody>
-      </p:sp>
-      <p:sp>
-        <p:nvSpPr>
-          <p:cNvPr id="26" name="Text 24"/>
-          <p:cNvSpPr/>
-          <p:nvPr/>
-        </p:nvSpPr>
-        <p:spPr>
-          <a:xfrm>
-            <a:off x="6553048" y="4617720"/>
-            <a:ext cx="4788256" cy="1600200"/>
-          </a:xfrm>
-          <a:prstGeom prst="rect">
-            <a:avLst/>
-          </a:prstGeom>
-          <a:noFill/>
-          <a:ln/>
-        </p:spPr>
-        <p:txBody>
-          <a:bodyPr wrap="square" rtlCol="0" anchor="t"/>
-          <a:lstStyle/>
-          <a:p>
-            <a:pPr marL="228600" indent="-228600">
-              <a:spcAft>
-                <a:spcPts val="600"/>
-              </a:spcAft>
-              <a:buSzPct val="100000"/>
-              <a:buChar char="•"/>
-            </a:pPr>
-            <a:r>
-              <a:rPr lang="en-US" sz="1400" dirty="0">
-                <a:solidFill>
-                  <a:srgbClr val="B8C0E0"/>
-                </a:solidFill>
-                <a:latin typeface="Calibri" pitchFamily="34" charset="0"/>
-                <a:ea typeface="Calibri" pitchFamily="34" charset="-122"/>
-                <a:cs typeface="Calibri" pitchFamily="34" charset="-120"/>
-              </a:rPr>
-              <a:t>Alias &amp; path mapping via vite.config.ts + tsconfig</a:t>
-            </a:r>
-            <a:endParaRPr lang="en-US" sz="1400" dirty="0"/>
-          </a:p>
-          <a:p>
-            <a:pPr marL="228600" indent="-228600">
-              <a:spcAft>
-                <a:spcPts val="600"/>
-              </a:spcAft>
-              <a:buSzPct val="100000"/>
-              <a:buChar char="•"/>
-            </a:pPr>
-            <a:r>
-              <a:rPr lang="en-US" sz="1400" dirty="0">
-                <a:solidFill>
-                  <a:srgbClr val="B8C0E0"/>
-                </a:solidFill>
-                <a:latin typeface="Calibri" pitchFamily="34" charset="0"/>
-                <a:ea typeface="Calibri" pitchFamily="34" charset="-122"/>
-                <a:cs typeface="Calibri" pitchFamily="34" charset="-120"/>
-              </a:rPr>
-              <a:t>Import static assets directly (images, CSS, etc.)</a:t>
-            </a:r>
-            <a:endParaRPr lang="en-US" sz="1400" dirty="0"/>
-          </a:p>
-          <a:p>
-            <a:pPr marL="228600" indent="-228600">
-              <a:spcAft>
-                <a:spcPts val="600"/>
-              </a:spcAft>
-              <a:buSzPct val="100000"/>
-              <a:buChar char="•"/>
-            </a:pPr>
-            <a:r>
-              <a:rPr lang="en-US" sz="1400" dirty="0">
-                <a:solidFill>
-                  <a:srgbClr val="B8C0E0"/>
-                </a:solidFill>
-                <a:latin typeface="Calibri" pitchFamily="34" charset="0"/>
-                <a:ea typeface="Calibri" pitchFamily="34" charset="-122"/>
-                <a:cs typeface="Calibri" pitchFamily="34" charset="-120"/>
-              </a:rPr>
-              <a:t>Add plugins for linting, testing, SVGR, PWA, SSR</a:t>
-            </a:r>
-            <a:endParaRPr lang="en-US" sz="1400" dirty="0"/>
           </a:p>
         </p:txBody>
       </p:sp>
